--- a/docs/assets/oshal/OSHAL-overview.pptx
+++ b/docs/assets/oshal/OSHAL-overview.pptx
@@ -15846,16 +15846,16 @@
                 </a:solidFill>
                 <a:latin typeface="Segoe UI"/>
               </a:rPr>
-              <a:t>$1.30 vs $4.05</a:t>
-            </a:r>
-            <a:r>
-              <a:rPr sz="1500" b="1">
+              <a:t>$1.30 (n=1) vs $4.05 (n=7)</a:t>
+            </a:r>
+            <a:r>
+              <a:rPr sz="1300" b="1">
                 <a:solidFill>
                   <a:srgbClr val="F8FAFC"/>
                 </a:solidFill>
                 <a:latin typeface="Segoe UI"/>
               </a:rPr>
-              <a:t>   per real incident RCA  </a:t>
+              <a:t>   per real incident RCA, one workload — not a benchmark  </a:t>
             </a:r>
             <a:r>
               <a:rPr sz="1800" b="1">
@@ -16225,7 +16225,7 @@
                 </a:solidFill>
                 <a:latin typeface="Segoe UI"/>
               </a:rPr>
-              <a:t>$4.05</a:t>
+              <a:t>$4.05 (n=7)</a:t>
             </a:r>
           </a:p>
           <a:p>
@@ -16282,7 +16282,7 @@
                 </a:solidFill>
                 <a:latin typeface="Segoe UI"/>
               </a:rPr>
-              <a:t>$1.30</a:t>
+              <a:t>$1.30 (n=1)</a:t>
             </a:r>
           </a:p>
           <a:p>
@@ -16321,6 +16321,25 @@
                 <a:latin typeface="Segoe UI"/>
               </a:rPr>
               <a:t>≈ 68% lower — reviewer-grade output from one bot</a:t>
+            </a:r>
+          </a:p>
+          <a:p>
+            <a:pPr algn="l">
+              <a:spcBef>
+                <a:spcPts val="0"/>
+              </a:spcBef>
+              <a:spcAft>
+                <a:spcPts val="400"/>
+              </a:spcAft>
+            </a:pPr>
+            <a:r>
+              <a:rPr sz="1100" b="0">
+                <a:solidFill>
+                  <a:srgbClr val="94A3B8"/>
+                </a:solidFill>
+                <a:latin typeface="Segoe UI"/>
+              </a:rPr>
+              <a:t>one workload, one corpus, one model — not a benchmark</a:t>
             </a:r>
           </a:p>
         </p:txBody>
